--- a/index/designs/y8-l7/l1-hobby-vocab/l1-hobby-vocab.pptx
+++ b/index/designs/y8-l7/l1-hobby-vocab/l1-hobby-vocab.pptx
@@ -2071,15 +2071,6 @@
               </a:rPr>
               <a:t>爱好</a:t>
             </a:r>
-            <a:pPr algn="ctr" indent="0" marL="0">
-              <a:lnSpc>
-                <a:spcPts val="8400"/>
-              </a:lnSpc>
-              <a:spcAft>
-                <a:spcPts val="1200"/>
-              </a:spcAft>
-              <a:buNone/>
-            </a:pPr>
             <a:r>
               <a:rPr lang="en-US" sz="8400" b="1" dirty="0">
                 <a:solidFill>
@@ -2091,15 +2082,6 @@
               </a:rPr>
               <a:t>·</a:t>
             </a:r>
-            <a:pPr algn="ctr" indent="0" marL="0">
-              <a:lnSpc>
-                <a:spcPts val="8400"/>
-              </a:lnSpc>
-              <a:spcAft>
-                <a:spcPts val="1200"/>
-              </a:spcAft>
-              <a:buNone/>
-            </a:pPr>
             <a:r>
               <a:rPr lang="en-US" sz="8400" dirty="0">
                 <a:solidFill>
@@ -2939,9 +2921,6 @@
               </a:rPr>
               <a:t>我喜欢</a:t>
             </a:r>
-            <a:pPr algn="l" indent="0" marL="0">
-              <a:buNone/>
-            </a:pPr>
             <a:r>
               <a:rPr lang="en-US" sz="1500" dirty="0">
                 <a:solidFill>
@@ -3063,9 +3042,6 @@
               </a:rPr>
               <a:t>我喜欢</a:t>
             </a:r>
-            <a:pPr algn="l" indent="0" marL="0">
-              <a:buNone/>
-            </a:pPr>
             <a:r>
               <a:rPr lang="en-US" sz="1500" dirty="0">
                 <a:solidFill>
@@ -3236,9 +3212,6 @@
               </a:rPr>
               <a:t>Use at least </a:t>
             </a:r>
-            <a:pPr algn="l" indent="0" marL="0">
-              <a:buNone/>
-            </a:pPr>
             <a:r>
               <a:rPr lang="en-US" sz="1200" b="1" dirty="0">
                 <a:solidFill>
@@ -3250,9 +3223,6 @@
               </a:rPr>
               <a:t>5 different words</a:t>
             </a:r>
-            <a:pPr algn="l" indent="0" marL="0">
-              <a:buNone/>
-            </a:pPr>
             <a:r>
               <a:rPr lang="en-US" sz="1200" dirty="0">
                 <a:solidFill>
@@ -3398,9 +3368,6 @@
               </a:rPr>
               <a:t>我喜欢</a:t>
             </a:r>
-            <a:pPr algn="l" indent="0" marL="0">
-              <a:buNone/>
-            </a:pPr>
             <a:r>
               <a:rPr lang="en-US" sz="1400" b="1" dirty="0">
                 <a:solidFill>
@@ -3412,9 +3379,6 @@
               </a:rPr>
               <a:t>______</a:t>
             </a:r>
-            <a:pPr algn="l" indent="0" marL="0">
-              <a:buNone/>
-            </a:pPr>
             <a:r>
               <a:rPr lang="en-US" sz="1400" dirty="0">
                 <a:solidFill>
@@ -3658,12 +3622,6 @@
               </a:rPr>
               <a:t>Add a second hobby: </a:t>
             </a:r>
-            <a:pPr algn="l" indent="0" marL="0">
-              <a:lnSpc>
-                <a:spcPts val="1260"/>
-              </a:lnSpc>
-              <a:buNone/>
-            </a:pPr>
             <a:r>
               <a:rPr lang="en-US" sz="900" dirty="0">
                 <a:solidFill>
@@ -4913,9 +4871,6 @@
               </a:rPr>
               <a:t>我喜欢</a:t>
             </a:r>
-            <a:pPr algn="l" indent="0" marL="0">
-              <a:buNone/>
-            </a:pPr>
             <a:r>
               <a:rPr lang="en-US" sz="1800" dirty="0">
                 <a:solidFill>
@@ -6504,12 +6459,6 @@
               </a:rPr>
               <a:t>Use the sentence you wrote in Activity 4. </a:t>
             </a:r>
-            <a:pPr algn="l" indent="0" marL="0">
-              <a:lnSpc>
-                <a:spcPts val="1500"/>
-              </a:lnSpc>
-              <a:buNone/>
-            </a:pPr>
             <a:r>
               <a:rPr lang="en-US" sz="1000" b="1" dirty="0">
                 <a:solidFill>
@@ -6521,12 +6470,6 @@
               </a:rPr>
               <a:t>Underline any word you're unsure about</a:t>
             </a:r>
-            <a:pPr algn="l" indent="0" marL="0">
-              <a:lnSpc>
-                <a:spcPts val="1500"/>
-              </a:lnSpc>
-              <a:buNone/>
-            </a:pPr>
             <a:r>
               <a:rPr lang="en-US" sz="1000" dirty="0">
                 <a:solidFill>
@@ -8014,15 +7957,6 @@
               </a:rPr>
               <a:t>Teacher shows </a:t>
             </a:r>
-            <a:pPr algn="l" indent="0" marL="0">
-              <a:lnSpc>
-                <a:spcPts val="1650"/>
-              </a:lnSpc>
-              <a:spcAft>
-                <a:spcPts val="800"/>
-              </a:spcAft>
-              <a:buNone/>
-            </a:pPr>
             <a:r>
               <a:rPr lang="en-US" sz="1100" b="1" dirty="0">
                 <a:solidFill>
@@ -8034,15 +7968,6 @@
               </a:rPr>
               <a:t>Chinese character</a:t>
             </a:r>
-            <a:pPr algn="l" indent="0" marL="0">
-              <a:lnSpc>
-                <a:spcPts val="1650"/>
-              </a:lnSpc>
-              <a:spcAft>
-                <a:spcPts val="800"/>
-              </a:spcAft>
-              <a:buNone/>
-            </a:pPr>
             <a:r>
               <a:rPr lang="en-US" sz="1100" dirty="0">
                 <a:solidFill>
@@ -8078,15 +8003,6 @@
               </a:rPr>
               <a:t>Reverse: teacher says </a:t>
             </a:r>
-            <a:pPr algn="l" indent="0" marL="0">
-              <a:lnSpc>
-                <a:spcPts val="1650"/>
-              </a:lnSpc>
-              <a:spcAft>
-                <a:spcPts val="800"/>
-              </a:spcAft>
-              <a:buNone/>
-            </a:pPr>
             <a:r>
               <a:rPr lang="en-US" sz="1100" b="1" dirty="0">
                 <a:solidFill>
@@ -8098,15 +8014,6 @@
               </a:rPr>
               <a:t>English</a:t>
             </a:r>
-            <a:pPr algn="l" indent="0" marL="0">
-              <a:lnSpc>
-                <a:spcPts val="1650"/>
-              </a:lnSpc>
-              <a:spcAft>
-                <a:spcPts val="800"/>
-              </a:spcAft>
-              <a:buNone/>
-            </a:pPr>
             <a:r>
               <a:rPr lang="en-US" sz="1100" dirty="0">
                 <a:solidFill>
@@ -8993,12 +8900,6 @@
               </a:rPr>
               <a:t>“Last unit we talked about </a:t>
             </a:r>
-            <a:pPr algn="l" indent="0" marL="0">
-              <a:lnSpc>
-                <a:spcPts val="1595"/>
-              </a:lnSpc>
-              <a:buNone/>
-            </a:pPr>
             <a:r>
               <a:rPr lang="en-US" sz="1100" b="1" dirty="0">
                 <a:solidFill>
@@ -9010,12 +8911,6 @@
               </a:rPr>
               <a:t>daily routines</a:t>
             </a:r>
-            <a:pPr algn="l" indent="0" marL="0">
-              <a:lnSpc>
-                <a:spcPts val="1595"/>
-              </a:lnSpc>
-              <a:buNone/>
-            </a:pPr>
             <a:r>
               <a:rPr lang="en-US" sz="1100" dirty="0">
                 <a:solidFill>
@@ -9027,12 +8922,6 @@
               </a:rPr>
               <a:t> — today we start a new topic: </a:t>
             </a:r>
-            <a:pPr algn="l" indent="0" marL="0">
-              <a:lnSpc>
-                <a:spcPts val="1595"/>
-              </a:lnSpc>
-              <a:buNone/>
-            </a:pPr>
             <a:r>
               <a:rPr lang="en-US" sz="1100" b="1" dirty="0">
                 <a:solidFill>
@@ -9044,12 +8933,6 @@
               </a:rPr>
               <a:t>爱好 (hobbies)</a:t>
             </a:r>
-            <a:pPr algn="l" indent="0" marL="0">
-              <a:lnSpc>
-                <a:spcPts val="1595"/>
-              </a:lnSpc>
-              <a:buNone/>
-            </a:pPr>
             <a:r>
               <a:rPr lang="en-US" sz="1100" dirty="0">
                 <a:solidFill>
@@ -9537,12 +9420,6 @@
               </a:rPr>
               <a:t>We are learning to </a:t>
             </a:r>
-            <a:pPr algn="l" indent="0" marL="0">
-              <a:lnSpc>
-                <a:spcPts val="2025"/>
-              </a:lnSpc>
-              <a:buNone/>
-            </a:pPr>
             <a:r>
               <a:rPr lang="en-US" sz="1500" b="1" dirty="0">
                 <a:solidFill>
@@ -9554,12 +9431,6 @@
               </a:rPr>
               <a:t>name our hobbies</a:t>
             </a:r>
-            <a:pPr algn="l" indent="0" marL="0">
-              <a:lnSpc>
-                <a:spcPts val="2025"/>
-              </a:lnSpc>
-              <a:buNone/>
-            </a:pPr>
             <a:r>
               <a:rPr lang="en-US" sz="1500" dirty="0">
                 <a:solidFill>
@@ -9686,12 +9557,6 @@
               </a:rPr>
               <a:t>I can say </a:t>
             </a:r>
-            <a:pPr algn="l" indent="0" marL="0">
-              <a:lnSpc>
-                <a:spcPts val="1820"/>
-              </a:lnSpc>
-              <a:buNone/>
-            </a:pPr>
             <a:r>
               <a:rPr lang="en-US" sz="1300" b="1" dirty="0">
                 <a:solidFill>
@@ -9703,12 +9568,6 @@
               </a:rPr>
               <a:t>8+ hobby words</a:t>
             </a:r>
-            <a:pPr algn="l" indent="0" marL="0">
-              <a:lnSpc>
-                <a:spcPts val="1820"/>
-              </a:lnSpc>
-              <a:buNone/>
-            </a:pPr>
             <a:r>
               <a:rPr lang="en-US" sz="1300" dirty="0">
                 <a:solidFill>
@@ -9720,12 +9579,6 @@
               </a:rPr>
               <a:t> in Chinese — </a:t>
             </a:r>
-            <a:pPr algn="l" indent="0" marL="0">
-              <a:lnSpc>
-                <a:spcPts val="1820"/>
-              </a:lnSpc>
-              <a:buNone/>
-            </a:pPr>
             <a:r>
               <a:rPr lang="en-US" sz="1300" dirty="0">
                 <a:solidFill>
@@ -9852,12 +9705,6 @@
               </a:rPr>
               <a:t>I can say what my hobby is using </a:t>
             </a:r>
-            <a:pPr algn="l" indent="0" marL="0">
-              <a:lnSpc>
-                <a:spcPts val="1820"/>
-              </a:lnSpc>
-              <a:buNone/>
-            </a:pPr>
             <a:r>
               <a:rPr lang="en-US" sz="1300" dirty="0">
                 <a:solidFill>
@@ -9869,12 +9716,6 @@
               </a:rPr>
               <a:t>我喜欢……</a:t>
             </a:r>
-            <a:pPr algn="l" indent="0" marL="0">
-              <a:lnSpc>
-                <a:spcPts val="1820"/>
-              </a:lnSpc>
-              <a:buNone/>
-            </a:pPr>
             <a:r>
               <a:rPr lang="en-US" sz="1300" dirty="0">
                 <a:solidFill>
@@ -9886,12 +9727,6 @@
               </a:rPr>
               <a:t> </a:t>
             </a:r>
-            <a:pPr algn="l" indent="0" marL="0">
-              <a:lnSpc>
-                <a:spcPts val="1820"/>
-              </a:lnSpc>
-              <a:buNone/>
-            </a:pPr>
             <a:r>
               <a:rPr lang="en-US" sz="1300" i="1" dirty="0">
                 <a:solidFill>
@@ -10018,12 +9853,6 @@
               </a:rPr>
               <a:t>I can </a:t>
             </a:r>
-            <a:pPr algn="l" indent="0" marL="0">
-              <a:lnSpc>
-                <a:spcPts val="1820"/>
-              </a:lnSpc>
-              <a:buNone/>
-            </a:pPr>
             <a:r>
               <a:rPr lang="en-US" sz="1300" b="1" dirty="0">
                 <a:solidFill>
@@ -10035,12 +9864,6 @@
               </a:rPr>
               <a:t>mime actions</a:t>
             </a:r>
-            <a:pPr algn="l" indent="0" marL="0">
-              <a:lnSpc>
-                <a:spcPts val="1820"/>
-              </a:lnSpc>
-              <a:buNone/>
-            </a:pPr>
             <a:r>
               <a:rPr lang="en-US" sz="1300" dirty="0">
                 <a:solidFill>
@@ -11912,12 +11735,6 @@
               </a:rPr>
               <a:t>弹 (tán)</a:t>
             </a:r>
-            <a:pPr algn="l" indent="0" marL="0">
-              <a:lnSpc>
-                <a:spcPts val="1485"/>
-              </a:lnSpc>
-              <a:buNone/>
-            </a:pPr>
             <a:r>
               <a:rPr lang="en-US" sz="1100" dirty="0">
                 <a:solidFill>
@@ -11929,12 +11746,6 @@
               </a:rPr>
               <a:t> = play a plucked or keyboard instrument → </a:t>
             </a:r>
-            <a:pPr algn="l" indent="0" marL="0">
-              <a:lnSpc>
-                <a:spcPts val="1485"/>
-              </a:lnSpc>
-              <a:buNone/>
-            </a:pPr>
             <a:r>
               <a:rPr lang="en-US" sz="1100" b="1" dirty="0">
                 <a:solidFill>
@@ -11946,12 +11757,6 @@
               </a:rPr>
               <a:t>弹钢琴</a:t>
             </a:r>
-            <a:pPr algn="l" indent="0" marL="0">
-              <a:lnSpc>
-                <a:spcPts val="1485"/>
-              </a:lnSpc>
-              <a:buNone/>
-            </a:pPr>
             <a:r>
               <a:rPr lang="en-US" sz="1100" dirty="0">
                 <a:solidFill>
@@ -11963,12 +11768,6 @@
               </a:rPr>
               <a:t> (piano) · </a:t>
             </a:r>
-            <a:pPr algn="l" indent="0" marL="0">
-              <a:lnSpc>
-                <a:spcPts val="1485"/>
-              </a:lnSpc>
-              <a:buNone/>
-            </a:pPr>
             <a:r>
               <a:rPr lang="en-US" sz="1100" b="1" dirty="0">
                 <a:solidFill>
@@ -11980,12 +11779,6 @@
               </a:rPr>
               <a:t>弹吉他</a:t>
             </a:r>
-            <a:pPr algn="l" indent="0" marL="0">
-              <a:lnSpc>
-                <a:spcPts val="1485"/>
-              </a:lnSpc>
-              <a:buNone/>
-            </a:pPr>
             <a:r>
               <a:rPr lang="en-US" sz="1100" dirty="0">
                 <a:solidFill>
@@ -12762,9 +12555,6 @@
               </a:rPr>
               <a:t>我喜欢</a:t>
             </a:r>
-            <a:pPr algn="l" indent="0" marL="0">
-              <a:buNone/>
-            </a:pPr>
             <a:r>
               <a:rPr lang="en-US" sz="1700" dirty="0">
                 <a:solidFill>
@@ -12890,9 +12680,6 @@
               </a:rPr>
               <a:t>我喜欢</a:t>
             </a:r>
-            <a:pPr algn="l" indent="0" marL="0">
-              <a:buNone/>
-            </a:pPr>
             <a:r>
               <a:rPr lang="en-US" sz="1700" dirty="0">
                 <a:solidFill>
@@ -13018,9 +12805,6 @@
               </a:rPr>
               <a:t>我喜欢</a:t>
             </a:r>
-            <a:pPr algn="l" indent="0" marL="0">
-              <a:buNone/>
-            </a:pPr>
             <a:r>
               <a:rPr lang="en-US" sz="1700" dirty="0">
                 <a:solidFill>
@@ -13146,9 +12930,6 @@
               </a:rPr>
               <a:t>我喜欢</a:t>
             </a:r>
-            <a:pPr algn="l" indent="0" marL="0">
-              <a:buNone/>
-            </a:pPr>
             <a:r>
               <a:rPr lang="en-US" sz="1700" dirty="0">
                 <a:solidFill>
@@ -13160,9 +12941,6 @@
               </a:rPr>
               <a:t>玩电脑游戏，</a:t>
             </a:r>
-            <a:pPr algn="l" indent="0" marL="0">
-              <a:buNone/>
-            </a:pPr>
             <a:r>
               <a:rPr lang="en-US" sz="1700" b="1" dirty="0">
                 <a:solidFill>
@@ -13174,9 +12952,6 @@
               </a:rPr>
               <a:t>不喜欢</a:t>
             </a:r>
-            <a:pPr algn="l" indent="0" marL="0">
-              <a:buNone/>
-            </a:pPr>
             <a:r>
               <a:rPr lang="en-US" sz="1700" dirty="0">
                 <a:solidFill>
@@ -13647,12 +13422,6 @@
               </a:rPr>
               <a:t>Write your answer on your mini whiteboard </a:t>
             </a:r>
-            <a:pPr algn="l" indent="0" marL="0">
-              <a:spcAft>
-                <a:spcPts val="2200"/>
-              </a:spcAft>
-              <a:buNone/>
-            </a:pPr>
             <a:r>
               <a:rPr lang="en-US" sz="1100" b="1" dirty="0">
                 <a:solidFill>
@@ -13816,15 +13585,6 @@
               </a:rPr>
               <a:t>What does </a:t>
             </a:r>
-            <a:pPr algn="l" indent="0" marL="0">
-              <a:lnSpc>
-                <a:spcPts val="1755"/>
-              </a:lnSpc>
-              <a:spcAft>
-                <a:spcPts val="500"/>
-              </a:spcAft>
-              <a:buNone/>
-            </a:pPr>
             <a:r>
               <a:rPr lang="en-US" sz="1300" b="1" dirty="0">
                 <a:solidFill>
@@ -13836,15 +13596,6 @@
               </a:rPr>
               <a:t>弹</a:t>
             </a:r>
-            <a:pPr algn="l" indent="0" marL="0">
-              <a:lnSpc>
-                <a:spcPts val="1755"/>
-              </a:lnSpc>
-              <a:spcAft>
-                <a:spcPts val="500"/>
-              </a:spcAft>
-              <a:buNone/>
-            </a:pPr>
             <a:r>
               <a:rPr lang="en-US" sz="1300" dirty="0">
                 <a:solidFill>
@@ -14047,15 +13798,6 @@
               </a:rPr>
               <a:t>How would I say “I like listening to music”? </a:t>
             </a:r>
-            <a:pPr algn="l" indent="0" marL="0">
-              <a:lnSpc>
-                <a:spcPts val="1755"/>
-              </a:lnSpc>
-              <a:spcAft>
-                <a:spcPts val="500"/>
-              </a:spcAft>
-              <a:buNone/>
-            </a:pPr>
             <a:r>
               <a:rPr lang="en-US" sz="1100" b="1" i="1" dirty="0">
                 <a:solidFill>
@@ -14258,15 +14000,6 @@
               </a:rPr>
               <a:t>What's the same and what's different between </a:t>
             </a:r>
-            <a:pPr algn="l" indent="0" marL="0">
-              <a:lnSpc>
-                <a:spcPts val="1755"/>
-              </a:lnSpc>
-              <a:spcAft>
-                <a:spcPts val="500"/>
-              </a:spcAft>
-              <a:buNone/>
-            </a:pPr>
             <a:r>
               <a:rPr lang="en-US" sz="1300" b="1" dirty="0">
                 <a:solidFill>
@@ -14278,15 +14011,6 @@
               </a:rPr>
               <a:t>弹钢琴</a:t>
             </a:r>
-            <a:pPr algn="l" indent="0" marL="0">
-              <a:lnSpc>
-                <a:spcPts val="1755"/>
-              </a:lnSpc>
-              <a:spcAft>
-                <a:spcPts val="500"/>
-              </a:spcAft>
-              <a:buNone/>
-            </a:pPr>
             <a:r>
               <a:rPr lang="en-US" sz="1300" dirty="0">
                 <a:solidFill>
@@ -14298,15 +14022,6 @@
               </a:rPr>
               <a:t> and </a:t>
             </a:r>
-            <a:pPr algn="l" indent="0" marL="0">
-              <a:lnSpc>
-                <a:spcPts val="1755"/>
-              </a:lnSpc>
-              <a:spcAft>
-                <a:spcPts val="500"/>
-              </a:spcAft>
-              <a:buNone/>
-            </a:pPr>
             <a:r>
               <a:rPr lang="en-US" sz="1300" b="1" dirty="0">
                 <a:solidFill>
@@ -14318,15 +14033,6 @@
               </a:rPr>
               <a:t>弹吉他</a:t>
             </a:r>
-            <a:pPr algn="l" indent="0" marL="0">
-              <a:lnSpc>
-                <a:spcPts val="1755"/>
-              </a:lnSpc>
-              <a:spcAft>
-                <a:spcPts val="500"/>
-              </a:spcAft>
-              <a:buNone/>
-            </a:pPr>
             <a:r>
               <a:rPr lang="en-US" sz="1300" dirty="0">
                 <a:solidFill>
@@ -16041,15 +15747,6 @@
               </a:rPr>
               <a:t>Teacher calls out a hobby verb — e.g. </a:t>
             </a:r>
-            <a:pPr algn="l" indent="0" marL="0">
-              <a:lnSpc>
-                <a:spcPts val="1595"/>
-              </a:lnSpc>
-              <a:spcAft>
-                <a:spcPts val="800"/>
-              </a:spcAft>
-              <a:buNone/>
-            </a:pPr>
             <a:r>
               <a:rPr lang="en-US" sz="1100" b="1" dirty="0">
                 <a:solidFill>
@@ -16085,15 +15782,6 @@
               </a:rPr>
               <a:t>Students </a:t>
             </a:r>
-            <a:pPr algn="l" indent="0" marL="0">
-              <a:lnSpc>
-                <a:spcPts val="1595"/>
-              </a:lnSpc>
-              <a:spcAft>
-                <a:spcPts val="800"/>
-              </a:spcAft>
-              <a:buNone/>
-            </a:pPr>
             <a:r>
               <a:rPr lang="en-US" sz="1100" b="1" dirty="0">
                 <a:solidFill>
@@ -16105,15 +15793,6 @@
               </a:rPr>
               <a:t>mime the action</a:t>
             </a:r>
-            <a:pPr algn="l" indent="0" marL="0">
-              <a:lnSpc>
-                <a:spcPts val="1595"/>
-              </a:lnSpc>
-              <a:spcAft>
-                <a:spcPts val="800"/>
-              </a:spcAft>
-              <a:buNone/>
-            </a:pPr>
             <a:r>
               <a:rPr lang="en-US" sz="1100" dirty="0">
                 <a:solidFill>
@@ -16149,15 +15828,6 @@
               </a:rPr>
               <a:t>Reverse:</a:t>
             </a:r>
-            <a:pPr algn="l" indent="0" marL="0">
-              <a:lnSpc>
-                <a:spcPts val="1595"/>
-              </a:lnSpc>
-              <a:spcAft>
-                <a:spcPts val="800"/>
-              </a:spcAft>
-              <a:buNone/>
-            </a:pPr>
             <a:r>
               <a:rPr lang="en-US" sz="1100" dirty="0">
                 <a:solidFill>
@@ -17925,15 +17595,6 @@
               </a:rPr>
               <a:t>Draw a </a:t>
             </a:r>
-            <a:pPr algn="l" indent="0" marL="0">
-              <a:lnSpc>
-                <a:spcPts val="1595"/>
-              </a:lnSpc>
-              <a:spcAft>
-                <a:spcPts val="900"/>
-              </a:spcAft>
-              <a:buNone/>
-            </a:pPr>
             <a:r>
               <a:rPr lang="en-US" sz="1100" b="1" dirty="0">
                 <a:solidFill>
@@ -17945,15 +17606,6 @@
               </a:rPr>
               <a:t>3-column table</a:t>
             </a:r>
-            <a:pPr algn="l" indent="0" marL="0">
-              <a:lnSpc>
-                <a:spcPts val="1595"/>
-              </a:lnSpc>
-              <a:spcAft>
-                <a:spcPts val="900"/>
-              </a:spcAft>
-              <a:buNone/>
-            </a:pPr>
             <a:r>
               <a:rPr lang="en-US" sz="1100" dirty="0">
                 <a:solidFill>
@@ -17989,15 +17641,6 @@
               </a:rPr>
               <a:t>Teacher calls out </a:t>
             </a:r>
-            <a:pPr algn="l" indent="0" marL="0">
-              <a:lnSpc>
-                <a:spcPts val="1595"/>
-              </a:lnSpc>
-              <a:spcAft>
-                <a:spcPts val="900"/>
-              </a:spcAft>
-              <a:buNone/>
-            </a:pPr>
             <a:r>
               <a:rPr lang="en-US" sz="1100" b="1" dirty="0">
                 <a:solidFill>
@@ -18009,15 +17652,6 @@
               </a:rPr>
               <a:t>6 words</a:t>
             </a:r>
-            <a:pPr algn="l" indent="0" marL="0">
-              <a:lnSpc>
-                <a:spcPts val="1595"/>
-              </a:lnSpc>
-              <a:spcAft>
-                <a:spcPts val="900"/>
-              </a:spcAft>
-              <a:buNone/>
-            </a:pPr>
             <a:r>
               <a:rPr lang="en-US" sz="1100" dirty="0">
                 <a:solidFill>
